--- a/ClinicFlow_Internship_Presentation.pptx
+++ b/ClinicFlow_Internship_Presentation.pptx
@@ -115,6 +115,35 @@
     </p:ext>
   </p:extLst>
 </p:presentation>
+</file>
+
+<file path=ppt/changesInfos/changesInfo1.xml><?xml version="1.0" encoding="utf-8"?>
+<pc:chgInfo xmlns:a="http://schemas.openxmlformats.org/drawingml/2006/main" xmlns:r="http://schemas.openxmlformats.org/officeDocument/2006/relationships" xmlns:ac="http://schemas.microsoft.com/office/drawing/2013/main/command" xmlns:pc="http://schemas.microsoft.com/office/powerpoint/2013/main/command">
+  <pc:docChgLst>
+    <pc:chgData name="Ansari, Aman (Contractor)" userId="cfc0bb31-e0d0-4d99-8a4f-03b82b973008" providerId="ADAL" clId="{F5A1252E-5C31-4E9C-B70F-0CA87846DD26}"/>
+    <pc:docChg chg="modSld">
+      <pc:chgData name="Ansari, Aman (Contractor)" userId="cfc0bb31-e0d0-4d99-8a4f-03b82b973008" providerId="ADAL" clId="{F5A1252E-5C31-4E9C-B70F-0CA87846DD26}" dt="2026-06-12T14:07:30.950" v="0" actId="1036"/>
+      <pc:docMkLst>
+        <pc:docMk/>
+      </pc:docMkLst>
+      <pc:sldChg chg="modSp mod">
+        <pc:chgData name="Ansari, Aman (Contractor)" userId="cfc0bb31-e0d0-4d99-8a4f-03b82b973008" providerId="ADAL" clId="{F5A1252E-5C31-4E9C-B70F-0CA87846DD26}" dt="2026-06-12T14:07:30.950" v="0" actId="1036"/>
+        <pc:sldMkLst>
+          <pc:docMk/>
+          <pc:sldMk cId="0" sldId="260"/>
+        </pc:sldMkLst>
+        <pc:spChg chg="mod">
+          <ac:chgData name="Ansari, Aman (Contractor)" userId="cfc0bb31-e0d0-4d99-8a4f-03b82b973008" providerId="ADAL" clId="{F5A1252E-5C31-4E9C-B70F-0CA87846DD26}" dt="2026-06-12T14:07:30.950" v="0" actId="1036"/>
+          <ac:spMkLst>
+            <pc:docMk/>
+            <pc:sldMk cId="0" sldId="260"/>
+            <ac:spMk id="9" creationId="{00000000-0000-0000-0000-000000000000}"/>
+          </ac:spMkLst>
+        </pc:spChg>
+      </pc:sldChg>
+    </pc:docChg>
+  </pc:docChgLst>
+</pc:chgInfo>
 </file>
 
 <file path=ppt/notesMasters/notesMaster1.xml><?xml version="1.0" encoding="utf-8"?>
@@ -3312,7 +3341,7 @@
         </p:nvSpPr>
         <p:spPr>
           <a:xfrm>
-            <a:off x="3172968" y="1371600"/>
+            <a:off x="3172968" y="1377538"/>
             <a:ext cx="2834640" cy="3474720"/>
           </a:xfrm>
           <a:prstGeom prst="rect">
